--- a/docs/slides/智能应用系统课程设计-第5题-答辩PPT.pptx
+++ b/docs/slides/智能应用系统课程设计-第5题-答辩PPT.pptx
@@ -22250,7 +22250,7 @@
                 </a:solidFill>
                 <a:latin typeface="Microsoft YaHei"/>
               </a:rPr>
-              <a:t>避免「10 门都是 Python 入门课」；消融实验显示移除 MMR 后 NDCG 也会下降。</a:t>
+              <a:t>避免「10 门都是 Python 入门课」；消融实验显示移除 MMR 后 NDCG 略升 0.0058，但 Diversity 从 0.969 掉到 0.904 —— 这是主动的取舍。</a:t>
             </a:r>
           </a:p>
         </p:txBody>
